--- a/ゲーム科1年/00_前期/ゲームプログラミングⅢ/ゲーム数学/座学/12_単位円.pptx
+++ b/ゲーム科1年/00_前期/ゲームプログラミングⅢ/ゲーム数学/座学/12_単位円.pptx
@@ -265,7 +265,7 @@
           <a:p>
             <a:fld id="{E9CC885B-4903-4D54-9A93-00025F12DED9}" type="datetimeFigureOut">
               <a:rPr kumimoji="1" lang="ja-JP" altLang="en-US" smtClean="0"/>
-              <a:t>2024/10/10</a:t>
+              <a:t>2025/6/26</a:t>
             </a:fld>
             <a:endParaRPr kumimoji="1" lang="ja-JP" altLang="en-US"/>
           </a:p>
@@ -495,7 +495,7 @@
           <a:p>
             <a:fld id="{E9CC885B-4903-4D54-9A93-00025F12DED9}" type="datetimeFigureOut">
               <a:rPr kumimoji="1" lang="ja-JP" altLang="en-US" smtClean="0"/>
-              <a:t>2024/10/10</a:t>
+              <a:t>2025/6/26</a:t>
             </a:fld>
             <a:endParaRPr kumimoji="1" lang="ja-JP" altLang="en-US"/>
           </a:p>
@@ -735,7 +735,7 @@
           <a:p>
             <a:fld id="{E9CC885B-4903-4D54-9A93-00025F12DED9}" type="datetimeFigureOut">
               <a:rPr kumimoji="1" lang="ja-JP" altLang="en-US" smtClean="0"/>
-              <a:t>2024/10/10</a:t>
+              <a:t>2025/6/26</a:t>
             </a:fld>
             <a:endParaRPr kumimoji="1" lang="ja-JP" altLang="en-US"/>
           </a:p>
@@ -965,7 +965,7 @@
           <a:p>
             <a:fld id="{E9CC885B-4903-4D54-9A93-00025F12DED9}" type="datetimeFigureOut">
               <a:rPr kumimoji="1" lang="ja-JP" altLang="en-US" smtClean="0"/>
-              <a:t>2024/10/10</a:t>
+              <a:t>2025/6/26</a:t>
             </a:fld>
             <a:endParaRPr kumimoji="1" lang="ja-JP" altLang="en-US"/>
           </a:p>
@@ -1240,7 +1240,7 @@
           <a:p>
             <a:fld id="{E9CC885B-4903-4D54-9A93-00025F12DED9}" type="datetimeFigureOut">
               <a:rPr kumimoji="1" lang="ja-JP" altLang="en-US" smtClean="0"/>
-              <a:t>2024/10/10</a:t>
+              <a:t>2025/6/26</a:t>
             </a:fld>
             <a:endParaRPr kumimoji="1" lang="ja-JP" altLang="en-US"/>
           </a:p>
@@ -1569,7 +1569,7 @@
           <a:p>
             <a:fld id="{E9CC885B-4903-4D54-9A93-00025F12DED9}" type="datetimeFigureOut">
               <a:rPr kumimoji="1" lang="ja-JP" altLang="en-US" smtClean="0"/>
-              <a:t>2024/10/10</a:t>
+              <a:t>2025/6/26</a:t>
             </a:fld>
             <a:endParaRPr kumimoji="1" lang="ja-JP" altLang="en-US"/>
           </a:p>
@@ -2045,7 +2045,7 @@
           <a:p>
             <a:fld id="{E9CC885B-4903-4D54-9A93-00025F12DED9}" type="datetimeFigureOut">
               <a:rPr kumimoji="1" lang="ja-JP" altLang="en-US" smtClean="0"/>
-              <a:t>2024/10/10</a:t>
+              <a:t>2025/6/26</a:t>
             </a:fld>
             <a:endParaRPr kumimoji="1" lang="ja-JP" altLang="en-US"/>
           </a:p>
@@ -2186,7 +2186,7 @@
           <a:p>
             <a:fld id="{E9CC885B-4903-4D54-9A93-00025F12DED9}" type="datetimeFigureOut">
               <a:rPr kumimoji="1" lang="ja-JP" altLang="en-US" smtClean="0"/>
-              <a:t>2024/10/10</a:t>
+              <a:t>2025/6/26</a:t>
             </a:fld>
             <a:endParaRPr kumimoji="1" lang="ja-JP" altLang="en-US"/>
           </a:p>
@@ -2299,7 +2299,7 @@
           <a:p>
             <a:fld id="{E9CC885B-4903-4D54-9A93-00025F12DED9}" type="datetimeFigureOut">
               <a:rPr kumimoji="1" lang="ja-JP" altLang="en-US" smtClean="0"/>
-              <a:t>2024/10/10</a:t>
+              <a:t>2025/6/26</a:t>
             </a:fld>
             <a:endParaRPr kumimoji="1" lang="ja-JP" altLang="en-US"/>
           </a:p>
@@ -2642,7 +2642,7 @@
           <a:p>
             <a:fld id="{E9CC885B-4903-4D54-9A93-00025F12DED9}" type="datetimeFigureOut">
               <a:rPr kumimoji="1" lang="ja-JP" altLang="en-US" smtClean="0"/>
-              <a:t>2024/10/10</a:t>
+              <a:t>2025/6/26</a:t>
             </a:fld>
             <a:endParaRPr kumimoji="1" lang="ja-JP" altLang="en-US"/>
           </a:p>
@@ -2930,7 +2930,7 @@
           <a:p>
             <a:fld id="{E9CC885B-4903-4D54-9A93-00025F12DED9}" type="datetimeFigureOut">
               <a:rPr kumimoji="1" lang="ja-JP" altLang="en-US" smtClean="0"/>
-              <a:t>2024/10/10</a:t>
+              <a:t>2025/6/26</a:t>
             </a:fld>
             <a:endParaRPr kumimoji="1" lang="ja-JP" altLang="en-US"/>
           </a:p>
@@ -3203,7 +3203,7 @@
           <a:p>
             <a:fld id="{E9CC885B-4903-4D54-9A93-00025F12DED9}" type="datetimeFigureOut">
               <a:rPr kumimoji="1" lang="ja-JP" altLang="en-US" smtClean="0"/>
-              <a:t>2024/10/10</a:t>
+              <a:t>2025/6/26</a:t>
             </a:fld>
             <a:endParaRPr kumimoji="1" lang="ja-JP" altLang="en-US"/>
           </a:p>
@@ -3864,8 +3864,8 @@
             </a:p>
           </p:txBody>
         </p:sp>
-        <mc:AlternateContent xmlns:mc="http://schemas.openxmlformats.org/markup-compatibility/2006">
-          <mc:Choice xmlns:a14="http://schemas.microsoft.com/office/drawing/2010/main" Requires="a14">
+        <mc:AlternateContent xmlns:mc="http://schemas.openxmlformats.org/markup-compatibility/2006" xmlns:a14="http://schemas.microsoft.com/office/drawing/2010/main">
+          <mc:Choice Requires="a14">
             <p:sp>
               <p:nvSpPr>
                 <p:cNvPr id="28" name="テキスト ボックス 27">
@@ -3894,6 +3894,7 @@
                 </a:bodyPr>
                 <a:lstStyle/>
                 <a:p>
+                  <a:pPr/>
                   <a14:m>
                     <m:oMathPara xmlns:m="http://schemas.openxmlformats.org/officeDocument/2006/math">
                       <m:oMathParaPr>
@@ -3914,7 +3915,7 @@
               </p:txBody>
             </p:sp>
           </mc:Choice>
-          <mc:Fallback>
+          <mc:Fallback xmlns="">
             <p:sp>
               <p:nvSpPr>
                 <p:cNvPr id="28" name="テキスト ボックス 27">
@@ -4074,8 +4075,8 @@
           </a:p>
         </p:txBody>
       </p:sp>
-      <mc:AlternateContent xmlns:mc="http://schemas.openxmlformats.org/markup-compatibility/2006">
-        <mc:Choice xmlns:a14="http://schemas.microsoft.com/office/drawing/2010/main" Requires="a14">
+      <mc:AlternateContent xmlns:mc="http://schemas.openxmlformats.org/markup-compatibility/2006" xmlns:a14="http://schemas.microsoft.com/office/drawing/2010/main">
+        <mc:Choice Requires="a14">
           <p:sp>
             <p:nvSpPr>
               <p:cNvPr id="6" name="テキスト ボックス 5">
@@ -4174,7 +4175,7 @@
             </p:txBody>
           </p:sp>
         </mc:Choice>
-        <mc:Fallback>
+        <mc:Fallback xmlns="">
           <p:sp>
             <p:nvSpPr>
               <p:cNvPr id="6" name="テキスト ボックス 5">
@@ -4371,8 +4372,8 @@
             </a:p>
           </p:txBody>
         </p:sp>
-        <mc:AlternateContent xmlns:mc="http://schemas.openxmlformats.org/markup-compatibility/2006">
-          <mc:Choice xmlns:a14="http://schemas.microsoft.com/office/drawing/2010/main" Requires="a14">
+        <mc:AlternateContent xmlns:mc="http://schemas.openxmlformats.org/markup-compatibility/2006" xmlns:a14="http://schemas.microsoft.com/office/drawing/2010/main">
+          <mc:Choice Requires="a14">
             <p:sp>
               <p:nvSpPr>
                 <p:cNvPr id="28" name="テキスト ボックス 27">
@@ -4401,6 +4402,7 @@
                 </a:bodyPr>
                 <a:lstStyle/>
                 <a:p>
+                  <a:pPr/>
                   <a14:m>
                     <m:oMathPara xmlns:m="http://schemas.openxmlformats.org/officeDocument/2006/math">
                       <m:oMathParaPr>
@@ -4421,7 +4423,7 @@
               </p:txBody>
             </p:sp>
           </mc:Choice>
-          <mc:Fallback>
+          <mc:Fallback xmlns="">
             <p:sp>
               <p:nvSpPr>
                 <p:cNvPr id="28" name="テキスト ボックス 27">
@@ -4467,8 +4469,8 @@
           </mc:Fallback>
         </mc:AlternateContent>
       </p:grpSp>
-      <mc:AlternateContent xmlns:mc="http://schemas.openxmlformats.org/markup-compatibility/2006">
-        <mc:Choice xmlns:a14="http://schemas.microsoft.com/office/drawing/2010/main" Requires="a14">
+      <mc:AlternateContent xmlns:mc="http://schemas.openxmlformats.org/markup-compatibility/2006" xmlns:a14="http://schemas.microsoft.com/office/drawing/2010/main">
+        <mc:Choice Requires="a14">
           <p:sp>
             <p:nvSpPr>
               <p:cNvPr id="10" name="テキスト ボックス 9">
@@ -4497,6 +4499,7 @@
               </a:bodyPr>
               <a:lstStyle/>
               <a:p>
+                <a:pPr/>
                 <a14:m>
                   <m:oMathPara xmlns:m="http://schemas.openxmlformats.org/officeDocument/2006/math">
                     <m:oMathParaPr>
@@ -4556,7 +4559,7 @@
             </p:txBody>
           </p:sp>
         </mc:Choice>
-        <mc:Fallback>
+        <mc:Fallback xmlns="">
           <p:sp>
             <p:nvSpPr>
               <p:cNvPr id="10" name="テキスト ボックス 9">
@@ -4713,8 +4716,8 @@
           </a:p>
         </p:txBody>
       </p:sp>
-      <mc:AlternateContent xmlns:mc="http://schemas.openxmlformats.org/markup-compatibility/2006">
-        <mc:Choice xmlns:a14="http://schemas.microsoft.com/office/drawing/2010/main" Requires="a14">
+      <mc:AlternateContent xmlns:mc="http://schemas.openxmlformats.org/markup-compatibility/2006" xmlns:a14="http://schemas.microsoft.com/office/drawing/2010/main">
+        <mc:Choice Requires="a14">
           <p:sp>
             <p:nvSpPr>
               <p:cNvPr id="6" name="テキスト ボックス 5">
@@ -4817,7 +4820,7 @@
             </p:txBody>
           </p:sp>
         </mc:Choice>
-        <mc:Fallback>
+        <mc:Fallback xmlns="">
           <p:sp>
             <p:nvSpPr>
               <p:cNvPr id="6" name="テキスト ボックス 5">
@@ -5014,8 +5017,8 @@
             </a:p>
           </p:txBody>
         </p:sp>
-        <mc:AlternateContent xmlns:mc="http://schemas.openxmlformats.org/markup-compatibility/2006">
-          <mc:Choice xmlns:a14="http://schemas.microsoft.com/office/drawing/2010/main" Requires="a14">
+        <mc:AlternateContent xmlns:mc="http://schemas.openxmlformats.org/markup-compatibility/2006" xmlns:a14="http://schemas.microsoft.com/office/drawing/2010/main">
+          <mc:Choice Requires="a14">
             <p:sp>
               <p:nvSpPr>
                 <p:cNvPr id="28" name="テキスト ボックス 27">
@@ -5044,6 +5047,7 @@
                 </a:bodyPr>
                 <a:lstStyle/>
                 <a:p>
+                  <a:pPr/>
                   <a14:m>
                     <m:oMathPara xmlns:m="http://schemas.openxmlformats.org/officeDocument/2006/math">
                       <m:oMathParaPr>
@@ -5064,7 +5068,7 @@
               </p:txBody>
             </p:sp>
           </mc:Choice>
-          <mc:Fallback>
+          <mc:Fallback xmlns="">
             <p:sp>
               <p:nvSpPr>
                 <p:cNvPr id="28" name="テキスト ボックス 27">
@@ -5110,8 +5114,8 @@
           </mc:Fallback>
         </mc:AlternateContent>
       </p:grpSp>
-      <mc:AlternateContent xmlns:mc="http://schemas.openxmlformats.org/markup-compatibility/2006">
-        <mc:Choice xmlns:a14="http://schemas.microsoft.com/office/drawing/2010/main" Requires="a14">
+      <mc:AlternateContent xmlns:mc="http://schemas.openxmlformats.org/markup-compatibility/2006" xmlns:a14="http://schemas.microsoft.com/office/drawing/2010/main">
+        <mc:Choice Requires="a14">
           <p:sp>
             <p:nvSpPr>
               <p:cNvPr id="10" name="テキスト ボックス 9">
@@ -5140,6 +5144,7 @@
               </a:bodyPr>
               <a:lstStyle/>
               <a:p>
+                <a:pPr/>
                 <a14:m>
                   <m:oMathPara xmlns:m="http://schemas.openxmlformats.org/officeDocument/2006/math">
                     <m:oMathParaPr>
@@ -5199,7 +5204,7 @@
             </p:txBody>
           </p:sp>
         </mc:Choice>
-        <mc:Fallback>
+        <mc:Fallback xmlns="">
           <p:sp>
             <p:nvSpPr>
               <p:cNvPr id="10" name="テキスト ボックス 9">
@@ -5516,8 +5521,8 @@
           </a:p>
         </p:txBody>
       </p:sp>
-      <mc:AlternateContent xmlns:mc="http://schemas.openxmlformats.org/markup-compatibility/2006">
-        <mc:Choice xmlns:a14="http://schemas.microsoft.com/office/drawing/2010/main" Requires="a14">
+      <mc:AlternateContent xmlns:mc="http://schemas.openxmlformats.org/markup-compatibility/2006" xmlns:a14="http://schemas.microsoft.com/office/drawing/2010/main">
+        <mc:Choice Requires="a14">
           <p:sp>
             <p:nvSpPr>
               <p:cNvPr id="25" name="テキスト ボックス 24">
@@ -5546,6 +5551,7 @@
               </a:bodyPr>
               <a:lstStyle/>
               <a:p>
+                <a:pPr/>
                 <a14:m>
                   <m:oMathPara xmlns:m="http://schemas.openxmlformats.org/officeDocument/2006/math">
                     <m:oMathParaPr>
@@ -5569,7 +5575,7 @@
             </p:txBody>
           </p:sp>
         </mc:Choice>
-        <mc:Fallback>
+        <mc:Fallback xmlns="">
           <p:sp>
             <p:nvSpPr>
               <p:cNvPr id="25" name="テキスト ボックス 24">
@@ -5646,6 +5652,60 @@
       </p:grpSpPr>
       <p:sp>
         <p:nvSpPr>
+          <p:cNvPr id="7" name="四角形: 角を丸くする 6">
+            <a:extLst>
+              <a:ext uri="{FF2B5EF4-FFF2-40B4-BE49-F238E27FC236}">
+                <a16:creationId xmlns:a16="http://schemas.microsoft.com/office/drawing/2014/main" id="{8BA9E264-0993-43D5-B610-325443A2B34B}"/>
+              </a:ext>
+            </a:extLst>
+          </p:cNvPr>
+          <p:cNvSpPr/>
+          <p:nvPr/>
+        </p:nvSpPr>
+        <p:spPr>
+          <a:xfrm>
+            <a:off x="316021" y="1678093"/>
+            <a:ext cx="10311099" cy="3638973"/>
+          </a:xfrm>
+          <a:prstGeom prst="roundRect">
+            <a:avLst/>
+          </a:prstGeom>
+          <a:solidFill>
+            <a:schemeClr val="bg1">
+              <a:lumMod val="85000"/>
+            </a:schemeClr>
+          </a:solidFill>
+          <a:ln>
+            <a:noFill/>
+          </a:ln>
+        </p:spPr>
+        <p:style>
+          <a:lnRef idx="2">
+            <a:schemeClr val="accent1">
+              <a:shade val="50000"/>
+            </a:schemeClr>
+          </a:lnRef>
+          <a:fillRef idx="1">
+            <a:schemeClr val="accent1"/>
+          </a:fillRef>
+          <a:effectRef idx="0">
+            <a:schemeClr val="accent1"/>
+          </a:effectRef>
+          <a:fontRef idx="minor">
+            <a:schemeClr val="lt1"/>
+          </a:fontRef>
+        </p:style>
+        <p:txBody>
+          <a:bodyPr rtlCol="0" anchor="ctr"/>
+          <a:lstStyle/>
+          <a:p>
+            <a:pPr algn="ctr"/>
+            <a:endParaRPr kumimoji="1" lang="ja-JP" altLang="en-US"/>
+          </a:p>
+        </p:txBody>
+      </p:sp>
+      <p:sp>
+        <p:nvSpPr>
           <p:cNvPr id="4" name="テキスト ボックス 3">
             <a:extLst>
               <a:ext uri="{FF2B5EF4-FFF2-40B4-BE49-F238E27FC236}">
@@ -5680,8 +5740,8 @@
           </a:p>
         </p:txBody>
       </p:sp>
-      <mc:AlternateContent xmlns:mc="http://schemas.openxmlformats.org/markup-compatibility/2006">
-        <mc:Choice xmlns:a14="http://schemas.microsoft.com/office/drawing/2010/main" Requires="a14">
+      <mc:AlternateContent xmlns:mc="http://schemas.openxmlformats.org/markup-compatibility/2006" xmlns:a14="http://schemas.microsoft.com/office/drawing/2010/main">
+        <mc:Choice Requires="a14">
           <p:sp>
             <p:nvSpPr>
               <p:cNvPr id="6" name="テキスト ボックス 5">
@@ -5785,7 +5845,7 @@
             </p:txBody>
           </p:sp>
         </mc:Choice>
-        <mc:Fallback>
+        <mc:Fallback xmlns="">
           <p:sp>
             <p:nvSpPr>
               <p:cNvPr id="6" name="テキスト ボックス 5">
@@ -5982,8 +6042,8 @@
             </a:p>
           </p:txBody>
         </p:sp>
-        <mc:AlternateContent xmlns:mc="http://schemas.openxmlformats.org/markup-compatibility/2006">
-          <mc:Choice xmlns:a14="http://schemas.microsoft.com/office/drawing/2010/main" Requires="a14">
+        <mc:AlternateContent xmlns:mc="http://schemas.openxmlformats.org/markup-compatibility/2006" xmlns:a14="http://schemas.microsoft.com/office/drawing/2010/main">
+          <mc:Choice Requires="a14">
             <p:sp>
               <p:nvSpPr>
                 <p:cNvPr id="28" name="テキスト ボックス 27">
@@ -6012,6 +6072,7 @@
                 </a:bodyPr>
                 <a:lstStyle/>
                 <a:p>
+                  <a:pPr/>
                   <a14:m>
                     <m:oMathPara xmlns:m="http://schemas.openxmlformats.org/officeDocument/2006/math">
                       <m:oMathParaPr>
@@ -6032,7 +6093,7 @@
               </p:txBody>
             </p:sp>
           </mc:Choice>
-          <mc:Fallback>
+          <mc:Fallback xmlns="">
             <p:sp>
               <p:nvSpPr>
                 <p:cNvPr id="28" name="テキスト ボックス 27">
@@ -6078,8 +6139,8 @@
           </mc:Fallback>
         </mc:AlternateContent>
       </p:grpSp>
-      <mc:AlternateContent xmlns:mc="http://schemas.openxmlformats.org/markup-compatibility/2006">
-        <mc:Choice xmlns:a14="http://schemas.microsoft.com/office/drawing/2010/main" Requires="a14">
+      <mc:AlternateContent xmlns:mc="http://schemas.openxmlformats.org/markup-compatibility/2006" xmlns:a14="http://schemas.microsoft.com/office/drawing/2010/main">
+        <mc:Choice Requires="a14">
           <p:sp>
             <p:nvSpPr>
               <p:cNvPr id="10" name="テキスト ボックス 9">
@@ -6108,6 +6169,7 @@
               </a:bodyPr>
               <a:lstStyle/>
               <a:p>
+                <a:pPr/>
                 <a14:m>
                   <m:oMathPara xmlns:m="http://schemas.openxmlformats.org/officeDocument/2006/math">
                     <m:oMathParaPr>
@@ -6225,7 +6287,7 @@
             </p:txBody>
           </p:sp>
         </mc:Choice>
-        <mc:Fallback>
+        <mc:Fallback xmlns="">
           <p:sp>
             <p:nvSpPr>
               <p:cNvPr id="10" name="テキスト ボックス 9">
@@ -6542,8 +6604,8 @@
           </a:p>
         </p:txBody>
       </p:sp>
-      <mc:AlternateContent xmlns:mc="http://schemas.openxmlformats.org/markup-compatibility/2006">
-        <mc:Choice xmlns:a14="http://schemas.microsoft.com/office/drawing/2010/main" Requires="a14">
+      <mc:AlternateContent xmlns:mc="http://schemas.openxmlformats.org/markup-compatibility/2006" xmlns:a14="http://schemas.microsoft.com/office/drawing/2010/main">
+        <mc:Choice Requires="a14">
           <p:sp>
             <p:nvSpPr>
               <p:cNvPr id="25" name="テキスト ボックス 24">
@@ -6572,6 +6634,7 @@
               </a:bodyPr>
               <a:lstStyle/>
               <a:p>
+                <a:pPr/>
                 <a14:m>
                   <m:oMathPara xmlns:m="http://schemas.openxmlformats.org/officeDocument/2006/math">
                     <m:oMathParaPr>
@@ -6595,7 +6658,7 @@
             </p:txBody>
           </p:sp>
         </mc:Choice>
-        <mc:Fallback>
+        <mc:Fallback xmlns="">
           <p:sp>
             <p:nvSpPr>
               <p:cNvPr id="25" name="テキスト ボックス 24">
@@ -6640,8 +6703,8 @@
           </p:sp>
         </mc:Fallback>
       </mc:AlternateContent>
-      <mc:AlternateContent xmlns:mc="http://schemas.openxmlformats.org/markup-compatibility/2006">
-        <mc:Choice xmlns:a14="http://schemas.microsoft.com/office/drawing/2010/main" Requires="a14">
+      <mc:AlternateContent xmlns:mc="http://schemas.openxmlformats.org/markup-compatibility/2006" xmlns:a14="http://schemas.microsoft.com/office/drawing/2010/main">
+        <mc:Choice Requires="a14">
           <p:sp>
             <p:nvSpPr>
               <p:cNvPr id="18" name="テキスト ボックス 17">
@@ -6670,6 +6733,7 @@
               </a:bodyPr>
               <a:lstStyle/>
               <a:p>
+                <a:pPr/>
                 <a14:m>
                   <m:oMathPara xmlns:m="http://schemas.openxmlformats.org/officeDocument/2006/math">
                     <m:oMathParaPr>
@@ -6693,7 +6757,7 @@
             </p:txBody>
           </p:sp>
         </mc:Choice>
-        <mc:Fallback>
+        <mc:Fallback xmlns="">
           <p:sp>
             <p:nvSpPr>
               <p:cNvPr id="18" name="テキスト ボックス 17">
@@ -6738,8 +6802,8 @@
           </p:sp>
         </mc:Fallback>
       </mc:AlternateContent>
-      <mc:AlternateContent xmlns:mc="http://schemas.openxmlformats.org/markup-compatibility/2006">
-        <mc:Choice xmlns:a14="http://schemas.microsoft.com/office/drawing/2010/main" Requires="a14">
+      <mc:AlternateContent xmlns:mc="http://schemas.openxmlformats.org/markup-compatibility/2006" xmlns:a14="http://schemas.microsoft.com/office/drawing/2010/main">
+        <mc:Choice Requires="a14">
           <p:sp>
             <p:nvSpPr>
               <p:cNvPr id="19" name="テキスト ボックス 18">
@@ -6768,6 +6832,7 @@
               </a:bodyPr>
               <a:lstStyle/>
               <a:p>
+                <a:pPr/>
                 <a14:m>
                   <m:oMathPara xmlns:m="http://schemas.openxmlformats.org/officeDocument/2006/math">
                     <m:oMathParaPr>
@@ -6788,7 +6853,7 @@
             </p:txBody>
           </p:sp>
         </mc:Choice>
-        <mc:Fallback>
+        <mc:Fallback xmlns="">
           <p:sp>
             <p:nvSpPr>
               <p:cNvPr id="19" name="テキスト ボックス 18">
@@ -6833,8 +6898,8 @@
           </p:sp>
         </mc:Fallback>
       </mc:AlternateContent>
-      <mc:AlternateContent xmlns:mc="http://schemas.openxmlformats.org/markup-compatibility/2006">
-        <mc:Choice xmlns:a14="http://schemas.microsoft.com/office/drawing/2010/main" Requires="a14">
+      <mc:AlternateContent xmlns:mc="http://schemas.openxmlformats.org/markup-compatibility/2006" xmlns:a14="http://schemas.microsoft.com/office/drawing/2010/main">
+        <mc:Choice Requires="a14">
           <p:sp>
             <p:nvSpPr>
               <p:cNvPr id="20" name="テキスト ボックス 19">
@@ -7057,7 +7122,7 @@
             </p:txBody>
           </p:sp>
         </mc:Choice>
-        <mc:Fallback>
+        <mc:Fallback xmlns="">
           <p:sp>
             <p:nvSpPr>
               <p:cNvPr id="20" name="テキスト ボックス 19">
@@ -7356,8 +7421,8 @@
             </a:p>
           </p:txBody>
         </p:sp>
-        <mc:AlternateContent xmlns:mc="http://schemas.openxmlformats.org/markup-compatibility/2006">
-          <mc:Choice xmlns:a14="http://schemas.microsoft.com/office/drawing/2010/main" Requires="a14">
+        <mc:AlternateContent xmlns:mc="http://schemas.openxmlformats.org/markup-compatibility/2006" xmlns:a14="http://schemas.microsoft.com/office/drawing/2010/main">
+          <mc:Choice Requires="a14">
             <p:sp>
               <p:nvSpPr>
                 <p:cNvPr id="28" name="テキスト ボックス 27">
@@ -7386,6 +7451,7 @@
                 </a:bodyPr>
                 <a:lstStyle/>
                 <a:p>
+                  <a:pPr/>
                   <a14:m>
                     <m:oMathPara xmlns:m="http://schemas.openxmlformats.org/officeDocument/2006/math">
                       <m:oMathParaPr>
@@ -7406,7 +7472,7 @@
               </p:txBody>
             </p:sp>
           </mc:Choice>
-          <mc:Fallback>
+          <mc:Fallback xmlns="">
             <p:sp>
               <p:nvSpPr>
                 <p:cNvPr id="28" name="テキスト ボックス 27">
@@ -7452,8 +7518,8 @@
           </mc:Fallback>
         </mc:AlternateContent>
       </p:grpSp>
-      <mc:AlternateContent xmlns:mc="http://schemas.openxmlformats.org/markup-compatibility/2006">
-        <mc:Choice xmlns:a14="http://schemas.microsoft.com/office/drawing/2010/main" Requires="a14">
+      <mc:AlternateContent xmlns:mc="http://schemas.openxmlformats.org/markup-compatibility/2006" xmlns:a14="http://schemas.microsoft.com/office/drawing/2010/main">
+        <mc:Choice Requires="a14">
           <p:sp>
             <p:nvSpPr>
               <p:cNvPr id="10" name="テキスト ボックス 9">
@@ -7482,6 +7548,7 @@
               </a:bodyPr>
               <a:lstStyle/>
               <a:p>
+                <a:pPr/>
                 <a14:m>
                   <m:oMathPara xmlns:m="http://schemas.openxmlformats.org/officeDocument/2006/math">
                     <m:oMathParaPr>
@@ -7599,7 +7666,7 @@
             </p:txBody>
           </p:sp>
         </mc:Choice>
-        <mc:Fallback>
+        <mc:Fallback xmlns="">
           <p:sp>
             <p:nvSpPr>
               <p:cNvPr id="10" name="テキスト ボックス 9">
@@ -7916,8 +7983,8 @@
           </a:p>
         </p:txBody>
       </p:sp>
-      <mc:AlternateContent xmlns:mc="http://schemas.openxmlformats.org/markup-compatibility/2006">
-        <mc:Choice xmlns:a14="http://schemas.microsoft.com/office/drawing/2010/main" Requires="a14">
+      <mc:AlternateContent xmlns:mc="http://schemas.openxmlformats.org/markup-compatibility/2006" xmlns:a14="http://schemas.microsoft.com/office/drawing/2010/main">
+        <mc:Choice Requires="a14">
           <p:sp>
             <p:nvSpPr>
               <p:cNvPr id="25" name="テキスト ボックス 24">
@@ -7946,6 +8013,7 @@
               </a:bodyPr>
               <a:lstStyle/>
               <a:p>
+                <a:pPr/>
                 <a14:m>
                   <m:oMathPara xmlns:m="http://schemas.openxmlformats.org/officeDocument/2006/math">
                     <m:oMathParaPr>
@@ -7969,7 +8037,7 @@
             </p:txBody>
           </p:sp>
         </mc:Choice>
-        <mc:Fallback>
+        <mc:Fallback xmlns="">
           <p:sp>
             <p:nvSpPr>
               <p:cNvPr id="25" name="テキスト ボックス 24">
@@ -8014,8 +8082,8 @@
           </p:sp>
         </mc:Fallback>
       </mc:AlternateContent>
-      <mc:AlternateContent xmlns:mc="http://schemas.openxmlformats.org/markup-compatibility/2006">
-        <mc:Choice xmlns:a14="http://schemas.microsoft.com/office/drawing/2010/main" Requires="a14">
+      <mc:AlternateContent xmlns:mc="http://schemas.openxmlformats.org/markup-compatibility/2006" xmlns:a14="http://schemas.microsoft.com/office/drawing/2010/main">
+        <mc:Choice Requires="a14">
           <p:sp>
             <p:nvSpPr>
               <p:cNvPr id="18" name="テキスト ボックス 17">
@@ -8044,6 +8112,7 @@
               </a:bodyPr>
               <a:lstStyle/>
               <a:p>
+                <a:pPr/>
                 <a14:m>
                   <m:oMathPara xmlns:m="http://schemas.openxmlformats.org/officeDocument/2006/math">
                     <m:oMathParaPr>
@@ -8067,7 +8136,7 @@
             </p:txBody>
           </p:sp>
         </mc:Choice>
-        <mc:Fallback>
+        <mc:Fallback xmlns="">
           <p:sp>
             <p:nvSpPr>
               <p:cNvPr id="18" name="テキスト ボックス 17">
@@ -8112,8 +8181,8 @@
           </p:sp>
         </mc:Fallback>
       </mc:AlternateContent>
-      <mc:AlternateContent xmlns:mc="http://schemas.openxmlformats.org/markup-compatibility/2006">
-        <mc:Choice xmlns:a14="http://schemas.microsoft.com/office/drawing/2010/main" Requires="a14">
+      <mc:AlternateContent xmlns:mc="http://schemas.openxmlformats.org/markup-compatibility/2006" xmlns:a14="http://schemas.microsoft.com/office/drawing/2010/main">
+        <mc:Choice Requires="a14">
           <p:sp>
             <p:nvSpPr>
               <p:cNvPr id="19" name="テキスト ボックス 18">
@@ -8142,6 +8211,7 @@
               </a:bodyPr>
               <a:lstStyle/>
               <a:p>
+                <a:pPr/>
                 <a14:m>
                   <m:oMathPara xmlns:m="http://schemas.openxmlformats.org/officeDocument/2006/math">
                     <m:oMathParaPr>
@@ -8162,7 +8232,7 @@
             </p:txBody>
           </p:sp>
         </mc:Choice>
-        <mc:Fallback>
+        <mc:Fallback xmlns="">
           <p:sp>
             <p:nvSpPr>
               <p:cNvPr id="19" name="テキスト ボックス 18">
@@ -8207,8 +8277,8 @@
           </p:sp>
         </mc:Fallback>
       </mc:AlternateContent>
-      <mc:AlternateContent xmlns:mc="http://schemas.openxmlformats.org/markup-compatibility/2006">
-        <mc:Choice xmlns:a14="http://schemas.microsoft.com/office/drawing/2010/main" Requires="a14">
+      <mc:AlternateContent xmlns:mc="http://schemas.openxmlformats.org/markup-compatibility/2006" xmlns:a14="http://schemas.microsoft.com/office/drawing/2010/main">
+        <mc:Choice Requires="a14">
           <p:sp>
             <p:nvSpPr>
               <p:cNvPr id="20" name="テキスト ボックス 19">
@@ -8440,7 +8510,7 @@
             </p:txBody>
           </p:sp>
         </mc:Choice>
-        <mc:Fallback>
+        <mc:Fallback xmlns="">
           <p:sp>
             <p:nvSpPr>
               <p:cNvPr id="20" name="テキスト ボックス 19">
@@ -8767,13 +8837,7 @@
                       <a:rPr lang="en-US" altLang="ja-JP" sz="2400" i="1" dirty="0" smtClean="0">
                         <a:latin typeface="Cambria Math" panose="02040503050406030204" pitchFamily="18" charset="0"/>
                       </a:rPr>
-                      <m:t>60</m:t>
-                    </m:r>
-                    <m:r>
-                      <a:rPr lang="en-US" altLang="ja-JP" sz="2400" i="1" dirty="0" smtClean="0">
-                        <a:latin typeface="Cambria Math" panose="02040503050406030204" pitchFamily="18" charset="0"/>
-                      </a:rPr>
-                      <m:t>°</m:t>
+                      <m:t>60°</m:t>
                     </m:r>
                   </m:oMath>
                 </a14:m>
@@ -8828,7 +8892,7 @@
                       <a:rPr lang="en-US" altLang="ja-JP" sz="2400" b="0" i="1" dirty="0" smtClean="0">
                         <a:latin typeface="Cambria Math" panose="02040503050406030204" pitchFamily="18" charset="0"/>
                       </a:rPr>
-                      <m:t>60°=20×0.8=16</m:t>
+                      <m:t>60°=20×0.5=10</m:t>
                     </m:r>
                   </m:oMath>
                 </a14:m>
@@ -8862,7 +8926,7 @@
                       <a:rPr lang="en-US" altLang="ja-JP" sz="2400" b="0" i="1" dirty="0" smtClean="0">
                         <a:latin typeface="Cambria Math" panose="02040503050406030204" pitchFamily="18" charset="0"/>
                       </a:rPr>
-                      <m:t>60°=20×0.5=10</m:t>
+                      <m:t>60°=20×0.8=16</m:t>
                     </m:r>
                   </m:oMath>
                 </a14:m>
@@ -8897,10 +8961,10 @@
                 <a14:m>
                   <m:oMath xmlns:m="http://schemas.openxmlformats.org/officeDocument/2006/math">
                     <m:r>
-                      <a:rPr lang="en-US" altLang="ja-JP" sz="2400" b="0" i="1" dirty="0" smtClean="0">
+                      <a:rPr lang="en-US" altLang="ja-JP" sz="2400" b="0" i="1" dirty="0">
                         <a:latin typeface="Cambria Math" panose="02040503050406030204" pitchFamily="18" charset="0"/>
                       </a:rPr>
-                      <m:t>16</m:t>
+                      <m:t>10</m:t>
                     </m:r>
                   </m:oMath>
                 </a14:m>
@@ -8925,10 +8989,10 @@
                 <a14:m>
                   <m:oMath xmlns:m="http://schemas.openxmlformats.org/officeDocument/2006/math">
                     <m:r>
-                      <a:rPr lang="en-US" altLang="ja-JP" sz="2400" b="0" i="1" dirty="0" smtClean="0">
+                      <a:rPr lang="en-US" altLang="ja-JP" sz="2400" b="0" i="1" dirty="0">
                         <a:latin typeface="Cambria Math" panose="02040503050406030204" pitchFamily="18" charset="0"/>
                       </a:rPr>
-                      <m:t>10</m:t>
+                      <m:t>16</m:t>
                     </m:r>
                   </m:oMath>
                 </a14:m>
@@ -8978,7 +9042,25 @@
                           <a:rPr lang="en-US" altLang="ja-JP" sz="2400" b="0" i="1" dirty="0" smtClean="0">
                             <a:latin typeface="Cambria Math" panose="02040503050406030204" pitchFamily="18" charset="0"/>
                           </a:rPr>
-                          <m:t>120+16, 300+10</m:t>
+                          <m:t>120+</m:t>
+                        </m:r>
+                        <m:r>
+                          <a:rPr lang="en-US" altLang="ja-JP" sz="2400" i="1" dirty="0">
+                            <a:latin typeface="Cambria Math" panose="02040503050406030204" pitchFamily="18" charset="0"/>
+                          </a:rPr>
+                          <m:t>10</m:t>
+                        </m:r>
+                        <m:r>
+                          <a:rPr lang="en-US" altLang="ja-JP" sz="2400" b="0" i="1" dirty="0" smtClean="0">
+                            <a:latin typeface="Cambria Math" panose="02040503050406030204" pitchFamily="18" charset="0"/>
+                          </a:rPr>
+                          <m:t>, 300+</m:t>
+                        </m:r>
+                        <m:r>
+                          <a:rPr lang="en-US" altLang="ja-JP" sz="2400" i="1" dirty="0">
+                            <a:latin typeface="Cambria Math" panose="02040503050406030204" pitchFamily="18" charset="0"/>
+                          </a:rPr>
+                          <m:t>16</m:t>
                         </m:r>
                       </m:e>
                     </m:d>
@@ -9004,7 +9086,16 @@
                         </a:solidFill>
                         <a:latin typeface="Cambria Math" panose="02040503050406030204" pitchFamily="18" charset="0"/>
                       </a:rPr>
-                      <m:t>𝟏𝟑𝟔</m:t>
+                      <m:t>𝟏𝟑</m:t>
+                    </m:r>
+                    <m:r>
+                      <a:rPr lang="en-US" altLang="ja-JP" sz="2400" b="1" i="1" dirty="0">
+                        <a:solidFill>
+                          <a:srgbClr val="FF0000"/>
+                        </a:solidFill>
+                        <a:latin typeface="Cambria Math" panose="02040503050406030204" pitchFamily="18" charset="0"/>
+                      </a:rPr>
+                      <m:t>𝟎</m:t>
                     </m:r>
                     <m:r>
                       <a:rPr lang="en-US" altLang="ja-JP" sz="2400" b="1" i="1" dirty="0" smtClean="0">
@@ -9022,7 +9113,7 @@
                         </a:solidFill>
                         <a:latin typeface="Cambria Math" panose="02040503050406030204" pitchFamily="18" charset="0"/>
                       </a:rPr>
-                      <m:t>𝟑𝟏𝟎</m:t>
+                      <m:t>𝟑𝟏𝟔</m:t>
                     </m:r>
                     <m:r>
                       <a:rPr lang="en-US" altLang="ja-JP" sz="2400" b="1" i="1" dirty="0" smtClean="0">
@@ -9241,8 +9332,8 @@
             </a:p>
           </p:txBody>
         </p:sp>
-        <mc:AlternateContent xmlns:mc="http://schemas.openxmlformats.org/markup-compatibility/2006">
-          <mc:Choice xmlns:a14="http://schemas.microsoft.com/office/drawing/2010/main" Requires="a14">
+        <mc:AlternateContent xmlns:mc="http://schemas.openxmlformats.org/markup-compatibility/2006" xmlns:a14="http://schemas.microsoft.com/office/drawing/2010/main">
+          <mc:Choice Requires="a14">
             <p:sp>
               <p:nvSpPr>
                 <p:cNvPr id="30" name="テキスト ボックス 29">
@@ -9271,6 +9362,7 @@
                 </a:bodyPr>
                 <a:lstStyle/>
                 <a:p>
+                  <a:pPr/>
                   <a14:m>
                     <m:oMathPara xmlns:m="http://schemas.openxmlformats.org/officeDocument/2006/math">
                       <m:oMathParaPr>
@@ -9291,7 +9383,7 @@
               </p:txBody>
             </p:sp>
           </mc:Choice>
-          <mc:Fallback>
+          <mc:Fallback xmlns="">
             <p:sp>
               <p:nvSpPr>
                 <p:cNvPr id="30" name="テキスト ボックス 29">
@@ -9609,8 +9701,8 @@
           </a:p>
         </p:txBody>
       </p:sp>
-      <mc:AlternateContent xmlns:mc="http://schemas.openxmlformats.org/markup-compatibility/2006">
-        <mc:Choice xmlns:a14="http://schemas.microsoft.com/office/drawing/2010/main" Requires="a14">
+      <mc:AlternateContent xmlns:mc="http://schemas.openxmlformats.org/markup-compatibility/2006" xmlns:a14="http://schemas.microsoft.com/office/drawing/2010/main">
+        <mc:Choice Requires="a14">
           <p:sp>
             <p:nvSpPr>
               <p:cNvPr id="37" name="テキスト ボックス 36">
@@ -9639,6 +9731,7 @@
               </a:bodyPr>
               <a:lstStyle/>
               <a:p>
+                <a:pPr/>
                 <a14:m>
                   <m:oMathPara xmlns:m="http://schemas.openxmlformats.org/officeDocument/2006/math">
                     <m:oMathParaPr>
@@ -9665,7 +9758,7 @@
             </p:txBody>
           </p:sp>
         </mc:Choice>
-        <mc:Fallback>
+        <mc:Fallback xmlns="">
           <p:sp>
             <p:nvSpPr>
               <p:cNvPr id="37" name="テキスト ボックス 36">
@@ -9710,8 +9803,8 @@
           </p:sp>
         </mc:Fallback>
       </mc:AlternateContent>
-      <mc:AlternateContent xmlns:mc="http://schemas.openxmlformats.org/markup-compatibility/2006">
-        <mc:Choice xmlns:a14="http://schemas.microsoft.com/office/drawing/2010/main" Requires="a14">
+      <mc:AlternateContent xmlns:mc="http://schemas.openxmlformats.org/markup-compatibility/2006" xmlns:a14="http://schemas.microsoft.com/office/drawing/2010/main">
+        <mc:Choice Requires="a14">
           <p:sp>
             <p:nvSpPr>
               <p:cNvPr id="40" name="テキスト ボックス 39">
@@ -9740,6 +9833,7 @@
               </a:bodyPr>
               <a:lstStyle/>
               <a:p>
+                <a:pPr/>
                 <a14:m>
                   <m:oMathPara xmlns:m="http://schemas.openxmlformats.org/officeDocument/2006/math">
                     <m:oMathParaPr>
@@ -9760,7 +9854,7 @@
             </p:txBody>
           </p:sp>
         </mc:Choice>
-        <mc:Fallback>
+        <mc:Fallback xmlns="">
           <p:sp>
             <p:nvSpPr>
               <p:cNvPr id="40" name="テキスト ボックス 39">
@@ -9835,6 +9929,7 @@
               </a:bodyPr>
               <a:lstStyle/>
               <a:p>
+                <a:pPr/>
                 <a14:m>
                   <m:oMathPara xmlns:m="http://schemas.openxmlformats.org/officeDocument/2006/math">
                     <m:oMathParaPr>
@@ -9848,7 +9943,43 @@
                           </a:solidFill>
                           <a:latin typeface="Cambria Math" panose="02040503050406030204" pitchFamily="18" charset="0"/>
                         </a:rPr>
-                        <m:t>(136, 310)</m:t>
+                        <m:t>(1</m:t>
+                      </m:r>
+                      <m:r>
+                        <a:rPr lang="en-US" altLang="ja-JP" i="1">
+                          <a:solidFill>
+                            <a:srgbClr val="FF0000"/>
+                          </a:solidFill>
+                          <a:latin typeface="Cambria Math" panose="02040503050406030204" pitchFamily="18" charset="0"/>
+                        </a:rPr>
+                        <m:t>30</m:t>
+                      </m:r>
+                      <m:r>
+                        <a:rPr lang="en-US" altLang="ja-JP" b="0" i="1" smtClean="0">
+                          <a:solidFill>
+                            <a:srgbClr val="FF0000"/>
+                          </a:solidFill>
+                          <a:latin typeface="Cambria Math" panose="02040503050406030204" pitchFamily="18" charset="0"/>
+                        </a:rPr>
+                        <m:t>, 3</m:t>
+                      </m:r>
+                      <m:r>
+                        <a:rPr lang="en-US" altLang="ja-JP" i="1">
+                          <a:solidFill>
+                            <a:srgbClr val="FF0000"/>
+                          </a:solidFill>
+                          <a:latin typeface="Cambria Math" panose="02040503050406030204" pitchFamily="18" charset="0"/>
+                        </a:rPr>
+                        <m:t>16</m:t>
+                      </m:r>
+                      <m:r>
+                        <a:rPr lang="en-US" altLang="ja-JP" b="0" i="1" smtClean="0">
+                          <a:solidFill>
+                            <a:srgbClr val="FF0000"/>
+                          </a:solidFill>
+                          <a:latin typeface="Cambria Math" panose="02040503050406030204" pitchFamily="18" charset="0"/>
+                        </a:rPr>
+                        <m:t>)</m:t>
                       </m:r>
                     </m:oMath>
                   </m:oMathPara>
@@ -9973,8 +10104,8 @@
           </a:p>
         </p:txBody>
       </p:sp>
-      <mc:AlternateContent xmlns:mc="http://schemas.openxmlformats.org/markup-compatibility/2006">
-        <mc:Choice xmlns:a14="http://schemas.microsoft.com/office/drawing/2010/main" Requires="a14">
+      <mc:AlternateContent xmlns:mc="http://schemas.openxmlformats.org/markup-compatibility/2006" xmlns:a14="http://schemas.microsoft.com/office/drawing/2010/main">
+        <mc:Choice Requires="a14">
           <p:sp>
             <p:nvSpPr>
               <p:cNvPr id="6" name="テキスト ボックス 5">
@@ -10144,7 +10275,7 @@
             </p:txBody>
           </p:sp>
         </mc:Choice>
-        <mc:Fallback>
+        <mc:Fallback xmlns="">
           <p:sp>
             <p:nvSpPr>
               <p:cNvPr id="6" name="テキスト ボックス 5">

--- a/ゲーム科1年/00_前期/ゲームプログラミングⅢ/ゲーム数学/座学/12_単位円.pptx
+++ b/ゲーム科1年/00_前期/ゲームプログラミングⅢ/ゲーム数学/座学/12_単位円.pptx
@@ -265,7 +265,7 @@
           <a:p>
             <a:fld id="{E9CC885B-4903-4D54-9A93-00025F12DED9}" type="datetimeFigureOut">
               <a:rPr kumimoji="1" lang="ja-JP" altLang="en-US" smtClean="0"/>
-              <a:t>2025/6/26</a:t>
+              <a:t>2026/5/19</a:t>
             </a:fld>
             <a:endParaRPr kumimoji="1" lang="ja-JP" altLang="en-US"/>
           </a:p>
@@ -495,7 +495,7 @@
           <a:p>
             <a:fld id="{E9CC885B-4903-4D54-9A93-00025F12DED9}" type="datetimeFigureOut">
               <a:rPr kumimoji="1" lang="ja-JP" altLang="en-US" smtClean="0"/>
-              <a:t>2025/6/26</a:t>
+              <a:t>2026/5/19</a:t>
             </a:fld>
             <a:endParaRPr kumimoji="1" lang="ja-JP" altLang="en-US"/>
           </a:p>
@@ -735,7 +735,7 @@
           <a:p>
             <a:fld id="{E9CC885B-4903-4D54-9A93-00025F12DED9}" type="datetimeFigureOut">
               <a:rPr kumimoji="1" lang="ja-JP" altLang="en-US" smtClean="0"/>
-              <a:t>2025/6/26</a:t>
+              <a:t>2026/5/19</a:t>
             </a:fld>
             <a:endParaRPr kumimoji="1" lang="ja-JP" altLang="en-US"/>
           </a:p>
@@ -965,7 +965,7 @@
           <a:p>
             <a:fld id="{E9CC885B-4903-4D54-9A93-00025F12DED9}" type="datetimeFigureOut">
               <a:rPr kumimoji="1" lang="ja-JP" altLang="en-US" smtClean="0"/>
-              <a:t>2025/6/26</a:t>
+              <a:t>2026/5/19</a:t>
             </a:fld>
             <a:endParaRPr kumimoji="1" lang="ja-JP" altLang="en-US"/>
           </a:p>
@@ -1240,7 +1240,7 @@
           <a:p>
             <a:fld id="{E9CC885B-4903-4D54-9A93-00025F12DED9}" type="datetimeFigureOut">
               <a:rPr kumimoji="1" lang="ja-JP" altLang="en-US" smtClean="0"/>
-              <a:t>2025/6/26</a:t>
+              <a:t>2026/5/19</a:t>
             </a:fld>
             <a:endParaRPr kumimoji="1" lang="ja-JP" altLang="en-US"/>
           </a:p>
@@ -1569,7 +1569,7 @@
           <a:p>
             <a:fld id="{E9CC885B-4903-4D54-9A93-00025F12DED9}" type="datetimeFigureOut">
               <a:rPr kumimoji="1" lang="ja-JP" altLang="en-US" smtClean="0"/>
-              <a:t>2025/6/26</a:t>
+              <a:t>2026/5/19</a:t>
             </a:fld>
             <a:endParaRPr kumimoji="1" lang="ja-JP" altLang="en-US"/>
           </a:p>
@@ -2045,7 +2045,7 @@
           <a:p>
             <a:fld id="{E9CC885B-4903-4D54-9A93-00025F12DED9}" type="datetimeFigureOut">
               <a:rPr kumimoji="1" lang="ja-JP" altLang="en-US" smtClean="0"/>
-              <a:t>2025/6/26</a:t>
+              <a:t>2026/5/19</a:t>
             </a:fld>
             <a:endParaRPr kumimoji="1" lang="ja-JP" altLang="en-US"/>
           </a:p>
@@ -2186,7 +2186,7 @@
           <a:p>
             <a:fld id="{E9CC885B-4903-4D54-9A93-00025F12DED9}" type="datetimeFigureOut">
               <a:rPr kumimoji="1" lang="ja-JP" altLang="en-US" smtClean="0"/>
-              <a:t>2025/6/26</a:t>
+              <a:t>2026/5/19</a:t>
             </a:fld>
             <a:endParaRPr kumimoji="1" lang="ja-JP" altLang="en-US"/>
           </a:p>
@@ -2299,7 +2299,7 @@
           <a:p>
             <a:fld id="{E9CC885B-4903-4D54-9A93-00025F12DED9}" type="datetimeFigureOut">
               <a:rPr kumimoji="1" lang="ja-JP" altLang="en-US" smtClean="0"/>
-              <a:t>2025/6/26</a:t>
+              <a:t>2026/5/19</a:t>
             </a:fld>
             <a:endParaRPr kumimoji="1" lang="ja-JP" altLang="en-US"/>
           </a:p>
@@ -2642,7 +2642,7 @@
           <a:p>
             <a:fld id="{E9CC885B-4903-4D54-9A93-00025F12DED9}" type="datetimeFigureOut">
               <a:rPr kumimoji="1" lang="ja-JP" altLang="en-US" smtClean="0"/>
-              <a:t>2025/6/26</a:t>
+              <a:t>2026/5/19</a:t>
             </a:fld>
             <a:endParaRPr kumimoji="1" lang="ja-JP" altLang="en-US"/>
           </a:p>
@@ -2930,7 +2930,7 @@
           <a:p>
             <a:fld id="{E9CC885B-4903-4D54-9A93-00025F12DED9}" type="datetimeFigureOut">
               <a:rPr kumimoji="1" lang="ja-JP" altLang="en-US" smtClean="0"/>
-              <a:t>2025/6/26</a:t>
+              <a:t>2026/5/19</a:t>
             </a:fld>
             <a:endParaRPr kumimoji="1" lang="ja-JP" altLang="en-US"/>
           </a:p>
@@ -3203,7 +3203,7 @@
           <a:p>
             <a:fld id="{E9CC885B-4903-4D54-9A93-00025F12DED9}" type="datetimeFigureOut">
               <a:rPr kumimoji="1" lang="ja-JP" altLang="en-US" smtClean="0"/>
-              <a:t>2025/6/26</a:t>
+              <a:t>2026/5/19</a:t>
             </a:fld>
             <a:endParaRPr kumimoji="1" lang="ja-JP" altLang="en-US"/>
           </a:p>
@@ -8825,10 +8825,18 @@
               </a:p>
               <a:p>
                 <a:r>
-                  <a:rPr lang="ja-JP" altLang="en-US" sz="2400" dirty="0"/>
+                  <a:rPr lang="ja-JP" altLang="en-US" sz="2400" b="1" dirty="0">
+                    <a:solidFill>
+                      <a:srgbClr val="FF0000"/>
+                    </a:solidFill>
+                  </a:rPr>
                   <a:t>■解答</a:t>
                 </a:r>
-                <a:endParaRPr lang="en-US" altLang="ja-JP" sz="2400" dirty="0"/>
+                <a:endParaRPr lang="en-US" altLang="ja-JP" sz="2400" b="1" dirty="0">
+                  <a:solidFill>
+                    <a:srgbClr val="FF0000"/>
+                  </a:solidFill>
+                </a:endParaRPr>
               </a:p>
               <a:p>
                 <a14:m>
@@ -9086,16 +9094,7 @@
                         </a:solidFill>
                         <a:latin typeface="Cambria Math" panose="02040503050406030204" pitchFamily="18" charset="0"/>
                       </a:rPr>
-                      <m:t>𝟏𝟑</m:t>
-                    </m:r>
-                    <m:r>
-                      <a:rPr lang="en-US" altLang="ja-JP" sz="2400" b="1" i="1" dirty="0">
-                        <a:solidFill>
-                          <a:srgbClr val="FF0000"/>
-                        </a:solidFill>
-                        <a:latin typeface="Cambria Math" panose="02040503050406030204" pitchFamily="18" charset="0"/>
-                      </a:rPr>
-                      <m:t>𝟎</m:t>
+                      <m:t>𝟏𝟑𝟎</m:t>
                     </m:r>
                     <m:r>
                       <a:rPr lang="en-US" altLang="ja-JP" sz="2400" b="1" i="1" dirty="0" smtClean="0">
@@ -9899,8 +9898,8 @@
           </p:sp>
         </mc:Fallback>
       </mc:AlternateContent>
-      <mc:AlternateContent xmlns:mc="http://schemas.openxmlformats.org/markup-compatibility/2006">
-        <mc:Choice xmlns:a14="http://schemas.microsoft.com/office/drawing/2010/main" Requires="a14">
+      <mc:AlternateContent xmlns:mc="http://schemas.openxmlformats.org/markup-compatibility/2006" xmlns:a14="http://schemas.microsoft.com/office/drawing/2010/main">
+        <mc:Choice Requires="a14">
           <p:sp>
             <p:nvSpPr>
               <p:cNvPr id="41" name="テキスト ボックス 40">
@@ -9993,7 +9992,7 @@
             </p:txBody>
           </p:sp>
         </mc:Choice>
-        <mc:Fallback>
+        <mc:Fallback xmlns="">
           <p:sp>
             <p:nvSpPr>
               <p:cNvPr id="41" name="テキスト ボックス 40">
